--- a/presentation.pptx
+++ b/presentation.pptx
@@ -8004,10 +8004,10 @@
                 <a:ea typeface="Calibri" pitchFamily="34" charset="-122"/>
                 <a:cs typeface="Calibri" pitchFamily="34" charset="-120"/>
               </a:rPr>
-              <a:t> foundation finetune/freeze, and MIST frozen. There are other XGBoost transfer </a:t>
-            </a:r>
-            <a:r>
-              <a:rPr lang="en-US" sz="1100">
+              <a:t> foundation finetune/freeze, and MIST frozen. There are other XGBoost transfer schemes potentially worth exploring. We did not test </a:t>
+            </a:r>
+            <a:r>
+              <a:rPr lang="en-US" sz="1100" dirty="0" err="1">
                 <a:solidFill>
                   <a:srgbClr val="334155"/>
                 </a:solidFill>
@@ -8015,7 +8015,7 @@
                 <a:ea typeface="Calibri" pitchFamily="34" charset="-122"/>
                 <a:cs typeface="Calibri" pitchFamily="34" charset="-120"/>
               </a:rPr>
-              <a:t>schemes potentially worth </a:t>
+              <a:t>LoRA</a:t>
             </a:r>
             <a:r>
               <a:rPr lang="en-US" sz="1100" dirty="0">
@@ -8026,7 +8026,29 @@
                 <a:ea typeface="Calibri" pitchFamily="34" charset="-122"/>
                 <a:cs typeface="Calibri" pitchFamily="34" charset="-120"/>
               </a:rPr>
-              <a:t>exploring.</a:t>
+              <a:t> fine-tuning protocols which tweak the embedding model itself for the new target; we likely could’ve eked more performance out of both </a:t>
+            </a:r>
+            <a:r>
+              <a:rPr lang="en-US" sz="1100" dirty="0" err="1">
+                <a:solidFill>
+                  <a:srgbClr val="334155"/>
+                </a:solidFill>
+                <a:latin typeface="Calibri" pitchFamily="34" charset="0"/>
+                <a:ea typeface="Calibri" pitchFamily="34" charset="-122"/>
+                <a:cs typeface="Calibri" pitchFamily="34" charset="-120"/>
+              </a:rPr>
+              <a:t>Chemeleon</a:t>
+            </a:r>
+            <a:r>
+              <a:rPr lang="en-US" sz="1100" dirty="0">
+                <a:solidFill>
+                  <a:srgbClr val="334155"/>
+                </a:solidFill>
+                <a:latin typeface="Calibri" pitchFamily="34" charset="0"/>
+                <a:ea typeface="Calibri" pitchFamily="34" charset="-122"/>
+                <a:cs typeface="Calibri" pitchFamily="34" charset="-120"/>
+              </a:rPr>
+              <a:t> and MIST.</a:t>
             </a:r>
             <a:endParaRPr lang="en-US" sz="1100" dirty="0"/>
           </a:p>

--- a/presentation.pptx
+++ b/presentation.pptx
@@ -6497,7 +6497,7 @@
                 <a:ea typeface="Calibri" pitchFamily="34" charset="-122"/>
                 <a:cs typeface="Calibri" pitchFamily="34" charset="-120"/>
               </a:rPr>
-              <a:t>MIST is another deep-learned foundation model, totally different training data, process, and size (it’s bigger!); why is it worse? Hard to say. Could be Chemeleon was trained on data more similar to these objectives.</a:t>
+              <a:t>MIST is another deep-learned foundation model, totally different training data, process, and size (it’s 20x bigger!); why is it worse? Hard to say. Could be Chemeleon was trained on data more similar to these objectives.</a:t>
             </a:r>
             <a:endParaRPr lang="en-US" sz="1200" dirty="0"/>
           </a:p>
